--- a/指づくりWS_運営ワークフロー_ダーク.pptx
+++ b/指づくりWS_運営ワークフロー_ダーク.pptx
@@ -8258,7 +8258,7 @@
                 <a:ea typeface="Yu Gothic UI"/>
                 <a:cs typeface="Yu Gothic UI"/>
               </a:rPr>
-              <a:t>席数6席。Canvaでブースレイアウト。什器は主催が用意する場合あり→要確認</a:t>
+              <a:t>最大6席（場所・イベントで変動。6席以上は不要）。Canvaでレイアウト。什器は主催が用意する場合あり→要確認</a:t>
             </a:r>
           </a:p>
         </p:txBody>
